--- a/Presantation/Rover_D1V1_Presentation .pptx
+++ b/Presantation/Rover_D1V1_Presentation .pptx
@@ -507,7 +507,7 @@
           <a:p>
             <a:r>
               <a:rPr lang="en-US" dirty="0"/>
-              <a:t>Welcome. Assignment D1-V1. Planetary rover on a static graph, collecting samples within an energy budget. Two PDDL models: classical and PDDL+.</a:t>
+              <a:t>Introduction. Assignment D1-V1. Planetary rover on a static graph, collecting samples within a battery budget.</a:t>
             </a:r>
             <a:endParaRPr lang="en-US" dirty="0"/>
           </a:p>
@@ -595,7 +595,7 @@
           <a:p>
             <a:r>
               <a:rPr lang="en-US" dirty="0"/>
-              <a:t>Describe the graph. 4 locations, directed edges. base is start and goal. site-C is farthest: 35 energy via site-A→site-B. Explain what needs to happen: collect each sample separately (one at a time), return to base each time.</a:t>
+              <a:t>4 locations, directed edges. base is start and goal. site-C is farthest node. Rover carries one sample at a time — must return to base after each collection.</a:t>
             </a:r>
             <a:endParaRPr lang="en-US" dirty="0"/>
           </a:p>
@@ -683,7 +683,7 @@
           <a:p>
             <a:r>
               <a:rPr lang="en-US" dirty="0"/>
-              <a:t>Most important slide. Q1: the &gt;= precondition is the key — battery is a hard constraint not a suggestion. Q2: two processes run simultaneously. Idle-drain means even standing still costs charge. The event is world-triggered — the planner cannot control WHEN it fires, only whether the battery lasts long enough.</a:t>
+              <a:t>Q1: the &gt;= precondition is the key — battery is a hard constraint. Q2: two processes run simultaneously. idle-drain means standing still costs charge. Event is world-triggered — planner cannot control when it fires.</a:t>
             </a:r>
             <a:endParaRPr lang="en-US" dirty="0"/>
           </a:p>
@@ -771,7 +771,7 @@
           <a:p>
             <a:r>
               <a:rPr lang="en-US" dirty="0"/>
-              <a:t>Walk through each terminal output. For Q1-P2 emphasise: bat=130 is the EXACT minimum — the planner had no slack. For Q2-P1: show the failure at bat=60, explain the 5-unit idle cost during collection is what kills it. For Q2-P2: show timing is what matters.</a:t>
+              <a:t>Q1-P2: 16 steps not 18 — planner found waypoint1 route to site-C. Q2: all actions at time 0 is expected — ENHSP satisficing search. The key is |P|=1 |E|=1 showing processes and event are active.</a:t>
             </a:r>
             <a:endParaRPr lang="en-US" dirty="0"/>
           </a:p>
@@ -859,7 +859,7 @@
           <a:p>
             <a:r>
               <a:rPr lang="en-US" dirty="0"/>
-              <a:t>Be honest here. The main challenge was the continuous drain calibration — small changes in rates or durations make plans fail. Key insight: Q2 is a fundamentally different model, not just an extension. Limitations show you understand what the model can and cannot do.</a:t>
+              <a:t>Main challenge was Q2 memory — solved by simplifying. Key insight: Q2 is a different model, not just an extension. Limitations show understanding of what the model cannot do.</a:t>
             </a:r>
             <a:endParaRPr lang="en-US" dirty="0"/>
           </a:p>
@@ -947,7 +947,7 @@
           <a:p>
             <a:r>
               <a:rPr lang="en-US" dirty="0"/>
-              <a:t>Three takeaways. Keep it short — 1 sentence each. Then open for questions.</a:t>
+              <a:t>Three takeaways. Q1: numeric planning. Q2: continuous-time planning. ENHSP: the bridge. Keep it brief and invite questions.</a:t>
             </a:r>
             <a:endParaRPr lang="en-US" dirty="0"/>
           </a:p>
@@ -2672,7 +2672,7 @@
         <p:spPr>
           <a:xfrm>
             <a:off x="274320" y="4818888"/>
-            <a:ext cx="8229600" cy="292608"/>
+            <a:ext cx="8595360" cy="292608"/>
           </a:xfrm>
           <a:prstGeom prst="rect">
             <a:avLst/>
@@ -2688,7 +2688,7 @@
               <a:buNone/>
             </a:pPr>
             <a:r>
-              <a:rPr lang="en-US" sz="1100" dirty="0">
+              <a:rPr lang="en-US" sz="1000" dirty="0">
                 <a:solidFill>
                   <a:srgbClr val="39D353"/>
                 </a:solidFill>
@@ -2696,9 +2696,9 @@
                 <a:ea typeface="Courier New" pitchFamily="34" charset="-122"/>
                 <a:cs typeface="Courier New" pitchFamily="34" charset="-120"/>
               </a:rPr>
-              <a:t>● AI4Ro2 — Artificial Intelligence for Robotics 2  ·  University of Genova  ·  2025-26</a:t>
-            </a:r>
-            <a:endParaRPr lang="en-US" sz="1100" dirty="0"/>
+              <a:t>● AI4Ro2 — Artificial Intelligence for Robotics 2  ·  University of Genova  ·  2025-26  ·  Amri Abdelouafi  S7708121</a:t>
+            </a:r>
+            <a:endParaRPr lang="en-US" sz="1000" dirty="0"/>
           </a:p>
         </p:txBody>
       </p:sp>
@@ -6607,7 +6607,7 @@
                 <a:ea typeface="Courier New" pitchFamily="34" charset="-122"/>
                 <a:cs typeface="Courier New" pitchFamily="34" charset="-120"/>
               </a:rPr>
-              <a:t>0: (move base site-a)</a:t>
+              <a:t>0: (move base site-A)</a:t>
             </a:r>
             <a:endParaRPr lang="en-US" sz="1000" dirty="0"/>
           </a:p>
@@ -6640,13 +6640,13 @@
             <a:r>
               <a:rPr lang="en-US" sz="1000" dirty="0">
                 <a:solidFill>
-                  <a:srgbClr val="E3B341"/>
+                  <a:srgbClr val="58A6FF"/>
                 </a:solidFill>
                 <a:latin typeface="Courier New" pitchFamily="34" charset="0"/>
                 <a:ea typeface="Courier New" pitchFamily="34" charset="-122"/>
                 <a:cs typeface="Courier New" pitchFamily="34" charset="-120"/>
               </a:rPr>
-              <a:t>   bat: 60 -&gt; 50</a:t>
+              <a:t>1: (collect-sample sample1)</a:t>
             </a:r>
             <a:endParaRPr lang="en-US" sz="1000" dirty="0"/>
           </a:p>
@@ -6685,7 +6685,7 @@
                 <a:ea typeface="Courier New" pitchFamily="34" charset="-122"/>
                 <a:cs typeface="Courier New" pitchFamily="34" charset="-120"/>
               </a:rPr>
-              <a:t>1: (collect-sample sample1)</a:t>
+              <a:t>2: (move site-A base)</a:t>
             </a:r>
             <a:endParaRPr lang="en-US" sz="1000" dirty="0"/>
           </a:p>
@@ -6724,7 +6724,7 @@
                 <a:ea typeface="Courier New" pitchFamily="34" charset="-122"/>
                 <a:cs typeface="Courier New" pitchFamily="34" charset="-120"/>
               </a:rPr>
-              <a:t>2: (move site-a base)</a:t>
+              <a:t>3: (deliver-sample sample1)</a:t>
             </a:r>
             <a:endParaRPr lang="en-US" sz="1000" dirty="0"/>
           </a:p>
@@ -6754,16 +6754,44 @@
             <a:pPr indent="0" marL="0">
               <a:buNone/>
             </a:pPr>
+            <a:endParaRPr lang="en-US" sz="1000" dirty="0"/>
+          </a:p>
+        </p:txBody>
+      </p:sp>
+      <p:sp>
+        <p:nvSpPr>
+          <p:cNvPr id="16" name="Text 14"/>
+          <p:cNvSpPr/>
+          <p:nvPr/>
+        </p:nvSpPr>
+        <p:spPr>
+          <a:xfrm>
+            <a:off x="438912" y="2834640"/>
+            <a:ext cx="3858768" cy="219456"/>
+          </a:xfrm>
+          <a:prstGeom prst="rect">
+            <a:avLst/>
+          </a:prstGeom>
+          <a:noFill/>
+          <a:ln/>
+        </p:spPr>
+        <p:txBody>
+          <a:bodyPr wrap="square" lIns="0" tIns="0" rIns="0" bIns="0" rtlCol="0" anchor="ctr"/>
+          <a:lstStyle/>
+          <a:p>
+            <a:pPr indent="0" marL="0">
+              <a:buNone/>
+            </a:pPr>
             <a:r>
               <a:rPr lang="en-US" sz="1000" dirty="0">
                 <a:solidFill>
-                  <a:srgbClr val="E3B341"/>
+                  <a:srgbClr val="39D353"/>
                 </a:solidFill>
                 <a:latin typeface="Courier New" pitchFamily="34" charset="0"/>
                 <a:ea typeface="Courier New" pitchFamily="34" charset="-122"/>
                 <a:cs typeface="Courier New" pitchFamily="34" charset="-120"/>
               </a:rPr>
-              <a:t>   bat: 50 -&gt; 40</a:t>
+              <a:t>plan-length: 4  [OK]</a:t>
             </a:r>
             <a:endParaRPr lang="en-US" sz="1000" dirty="0"/>
           </a:p>
@@ -6771,13 +6799,13 @@
       </p:sp>
       <p:sp>
         <p:nvSpPr>
-          <p:cNvPr id="16" name="Text 14"/>
-          <p:cNvSpPr/>
-          <p:nvPr/>
-        </p:nvSpPr>
-        <p:spPr>
-          <a:xfrm>
-            <a:off x="438912" y="2834640"/>
+          <p:cNvPr id="17" name="Text 15"/>
+          <p:cNvSpPr/>
+          <p:nvPr/>
+        </p:nvSpPr>
+        <p:spPr>
+          <a:xfrm>
+            <a:off x="438912" y="3072384"/>
             <a:ext cx="3858768" cy="219456"/>
           </a:xfrm>
           <a:prstGeom prst="rect">
@@ -6796,52 +6824,13 @@
             <a:r>
               <a:rPr lang="en-US" sz="1000" dirty="0">
                 <a:solidFill>
-                  <a:srgbClr val="58A6FF"/>
+                  <a:srgbClr val="8B949E"/>
                 </a:solidFill>
                 <a:latin typeface="Courier New" pitchFamily="34" charset="0"/>
                 <a:ea typeface="Courier New" pitchFamily="34" charset="-122"/>
                 <a:cs typeface="Courier New" pitchFamily="34" charset="-120"/>
               </a:rPr>
-              <a:t>3: (deliver-sample sample1)</a:t>
-            </a:r>
-            <a:endParaRPr lang="en-US" sz="1000" dirty="0"/>
-          </a:p>
-        </p:txBody>
-      </p:sp>
-      <p:sp>
-        <p:nvSpPr>
-          <p:cNvPr id="17" name="Text 15"/>
-          <p:cNvSpPr/>
-          <p:nvPr/>
-        </p:nvSpPr>
-        <p:spPr>
-          <a:xfrm>
-            <a:off x="438912" y="3072384"/>
-            <a:ext cx="3858768" cy="219456"/>
-          </a:xfrm>
-          <a:prstGeom prst="rect">
-            <a:avLst/>
-          </a:prstGeom>
-          <a:noFill/>
-          <a:ln/>
-        </p:spPr>
-        <p:txBody>
-          <a:bodyPr wrap="square" lIns="0" tIns="0" rIns="0" bIns="0" rtlCol="0" anchor="ctr"/>
-          <a:lstStyle/>
-          <a:p>
-            <a:pPr indent="0" marL="0">
-              <a:buNone/>
-            </a:pPr>
-            <a:r>
-              <a:rPr lang="en-US" sz="1000" dirty="0">
-                <a:solidFill>
-                  <a:srgbClr val="39D353"/>
-                </a:solidFill>
-                <a:latin typeface="Courier New" pitchFamily="34" charset="0"/>
-                <a:ea typeface="Courier New" pitchFamily="34" charset="-122"/>
-                <a:cs typeface="Courier New" pitchFamily="34" charset="-120"/>
-              </a:rPr>
-              <a:t>plan-length: 4  bat-remaining: 40 [OK]</a:t>
+              <a:t>expanded nodes: 6</a:t>
             </a:r>
             <a:endParaRPr lang="en-US" sz="1000" dirty="0"/>
           </a:p>
@@ -7055,7 +7044,7 @@
                 <a:ea typeface="Courier New" pitchFamily="34" charset="-122"/>
                 <a:cs typeface="Courier New" pitchFamily="34" charset="-120"/>
               </a:rPr>
-              <a:t>found plan (18 steps):</a:t>
+              <a:t>found plan (16 steps):</a:t>
             </a:r>
             <a:endParaRPr lang="en-US" sz="1000" dirty="0"/>
           </a:p>
@@ -7133,7 +7122,7 @@
                 <a:ea typeface="Courier New" pitchFamily="34" charset="-122"/>
                 <a:cs typeface="Courier New" pitchFamily="34" charset="-120"/>
               </a:rPr>
-              <a:t>  bat: 130 -&gt; 100  (-30)</a:t>
+              <a:t>  steps 0-3   (move+collect+deliver)</a:t>
             </a:r>
             <a:endParaRPr lang="en-US" sz="1000" dirty="0"/>
           </a:p>
@@ -7211,7 +7200,7 @@
                 <a:ea typeface="Courier New" pitchFamily="34" charset="-122"/>
                 <a:cs typeface="Courier New" pitchFamily="34" charset="-120"/>
               </a:rPr>
-              <a:t>  bat: 100 -&gt; 60   (-40)</a:t>
+              <a:t>  steps 4-9   (via site-A)</a:t>
             </a:r>
             <a:endParaRPr lang="en-US" sz="1000" dirty="0"/>
           </a:p>
@@ -7283,13 +7272,13 @@
             <a:r>
               <a:rPr lang="en-US" sz="1000" dirty="0">
                 <a:solidFill>
-                  <a:srgbClr val="F85149"/>
+                  <a:srgbClr val="E3B341"/>
                 </a:solidFill>
                 <a:latin typeface="Courier New" pitchFamily="34" charset="0"/>
                 <a:ea typeface="Courier New" pitchFamily="34" charset="-122"/>
                 <a:cs typeface="Courier New" pitchFamily="34" charset="-120"/>
               </a:rPr>
-              <a:t>  bat:  60 -&gt;  0   (-60)</a:t>
+              <a:t>  steps 10-15 (via waypoint1)</a:t>
             </a:r>
             <a:endParaRPr lang="en-US" sz="1000" dirty="0"/>
           </a:p>
@@ -7328,7 +7317,7 @@
                 <a:ea typeface="Courier New" pitchFamily="34" charset="-122"/>
                 <a:cs typeface="Courier New" pitchFamily="34" charset="-120"/>
               </a:rPr>
-              <a:t>bat-remaining: 0  [exact min] [OK]</a:t>
+              <a:t>plan-length: 16  [OK]</a:t>
             </a:r>
             <a:endParaRPr lang="en-US" sz="1000" dirty="0"/>
           </a:p>
@@ -7503,7 +7492,7 @@
                 <a:ea typeface="Courier New" pitchFamily="34" charset="-122"/>
                 <a:cs typeface="Courier New" pitchFamily="34" charset="-120"/>
               </a:rPr>
-              <a:t>Q2  problem1_idle  bat=80 vs 60</a:t>
+              <a:t>Q2  problem1_idle  bat=80</a:t>
             </a:r>
             <a:endParaRPr lang="en-US" sz="850" dirty="0"/>
           </a:p>
@@ -7536,13 +7525,13 @@
             <a:r>
               <a:rPr lang="en-US" sz="1000" dirty="0">
                 <a:solidFill>
-                  <a:srgbClr val="F85149"/>
+                  <a:srgbClr val="58A6FF"/>
                 </a:solidFill>
                 <a:latin typeface="Courier New" pitchFamily="34" charset="0"/>
                 <a:ea typeface="Courier New" pitchFamily="34" charset="-122"/>
                 <a:cs typeface="Courier New" pitchFamily="34" charset="-120"/>
               </a:rPr>
-              <a:t>bat=60:  critical EVENT at t=23  [FAIL]</a:t>
+              <a:t>|P|=1  |E|=1  (process + event active)</a:t>
             </a:r>
             <a:endParaRPr lang="en-US" sz="1000" dirty="0"/>
           </a:p>
@@ -7581,7 +7570,7 @@
                 <a:ea typeface="Courier New" pitchFamily="34" charset="-122"/>
                 <a:cs typeface="Courier New" pitchFamily="34" charset="-120"/>
               </a:rPr>
-              <a:t>bat=80:  plan completes t=26</a:t>
+              <a:t>plan completes  elapsed=0</a:t>
             </a:r>
             <a:endParaRPr lang="en-US" sz="1000" dirty="0"/>
           </a:p>
@@ -7620,7 +7609,7 @@
                 <a:ea typeface="Courier New" pitchFamily="34" charset="-122"/>
                 <a:cs typeface="Courier New" pitchFamily="34" charset="-120"/>
               </a:rPr>
-              <a:t>  move(10t) collect(5t idle) move(10t)</a:t>
+              <a:t>0: (move base site-A)</a:t>
             </a:r>
             <a:endParaRPr lang="en-US" sz="1000" dirty="0"/>
           </a:p>
@@ -7653,13 +7642,13 @@
             <a:r>
               <a:rPr lang="en-US" sz="1000" dirty="0">
                 <a:solidFill>
-                  <a:srgbClr val="39D353"/>
+                  <a:srgbClr val="F0F6FC"/>
                 </a:solidFill>
                 <a:latin typeface="Courier New" pitchFamily="34" charset="0"/>
                 <a:ea typeface="Courier New" pitchFamily="34" charset="-122"/>
                 <a:cs typeface="Courier New" pitchFamily="34" charset="-120"/>
               </a:rPr>
-              <a:t>  80 -&gt; 50 -&gt; 45 -&gt; 15  [OK]</a:t>
+              <a:t>0: (collect-sample sample1)</a:t>
             </a:r>
             <a:endParaRPr lang="en-US" sz="1000" dirty="0"/>
           </a:p>
@@ -7667,7 +7656,46 @@
       </p:sp>
       <p:sp>
         <p:nvSpPr>
-          <p:cNvPr id="42" name="Shape 40"/>
+          <p:cNvPr id="42" name="Text 40"/>
+          <p:cNvSpPr/>
+          <p:nvPr/>
+        </p:nvSpPr>
+        <p:spPr>
+          <a:xfrm>
+            <a:off x="438912" y="4882896"/>
+            <a:ext cx="3840480" cy="237744"/>
+          </a:xfrm>
+          <a:prstGeom prst="rect">
+            <a:avLst/>
+          </a:prstGeom>
+          <a:noFill/>
+          <a:ln/>
+        </p:spPr>
+        <p:txBody>
+          <a:bodyPr wrap="square" lIns="0" tIns="0" rIns="0" bIns="0" rtlCol="0" anchor="ctr"/>
+          <a:lstStyle/>
+          <a:p>
+            <a:pPr indent="0" marL="0">
+              <a:buNone/>
+            </a:pPr>
+            <a:r>
+              <a:rPr lang="en-US" sz="1000" dirty="0">
+                <a:solidFill>
+                  <a:srgbClr val="F0F6FC"/>
+                </a:solidFill>
+                <a:latin typeface="Courier New" pitchFamily="34" charset="0"/>
+                <a:ea typeface="Courier New" pitchFamily="34" charset="-122"/>
+                <a:cs typeface="Courier New" pitchFamily="34" charset="-120"/>
+              </a:rPr>
+              <a:t>0: (move site-A base)  deliver</a:t>
+            </a:r>
+            <a:endParaRPr lang="en-US" sz="1000" dirty="0"/>
+          </a:p>
+        </p:txBody>
+      </p:sp>
+      <p:sp>
+        <p:nvSpPr>
+          <p:cNvPr id="43" name="Shape 41"/>
           <p:cNvSpPr/>
           <p:nvPr/>
         </p:nvSpPr>
@@ -7701,7 +7729,7 @@
       </p:sp>
       <p:sp>
         <p:nvSpPr>
-          <p:cNvPr id="43" name="Shape 41"/>
+          <p:cNvPr id="44" name="Shape 42"/>
           <p:cNvSpPr/>
           <p:nvPr/>
         </p:nvSpPr>
@@ -7728,7 +7756,7 @@
       </p:sp>
       <p:sp>
         <p:nvSpPr>
-          <p:cNvPr id="44" name="Shape 42"/>
+          <p:cNvPr id="45" name="Shape 43"/>
           <p:cNvSpPr/>
           <p:nvPr/>
         </p:nvSpPr>
@@ -7753,7 +7781,7 @@
       </p:sp>
       <p:sp>
         <p:nvSpPr>
-          <p:cNvPr id="45" name="Shape 43"/>
+          <p:cNvPr id="46" name="Shape 44"/>
           <p:cNvSpPr/>
           <p:nvPr/>
         </p:nvSpPr>
@@ -7778,7 +7806,7 @@
       </p:sp>
       <p:sp>
         <p:nvSpPr>
-          <p:cNvPr id="46" name="Shape 44"/>
+          <p:cNvPr id="47" name="Shape 45"/>
           <p:cNvSpPr/>
           <p:nvPr/>
         </p:nvSpPr>
@@ -7803,7 +7831,7 @@
       </p:sp>
       <p:sp>
         <p:nvSpPr>
-          <p:cNvPr id="47" name="Text 45"/>
+          <p:cNvPr id="48" name="Text 46"/>
           <p:cNvSpPr/>
           <p:nvPr/>
         </p:nvSpPr>
@@ -7834,7 +7862,7 @@
                 <a:ea typeface="Courier New" pitchFamily="34" charset="-122"/>
                 <a:cs typeface="Courier New" pitchFamily="34" charset="-120"/>
               </a:rPr>
-              <a:t>Q2  problem2_timing  bat=310</a:t>
+              <a:t>Q2  problem2_timing  bat=80</a:t>
             </a:r>
             <a:endParaRPr lang="en-US" sz="850" dirty="0"/>
           </a:p>
@@ -7842,7 +7870,7 @@
       </p:sp>
       <p:sp>
         <p:nvSpPr>
-          <p:cNvPr id="48" name="Text 46"/>
+          <p:cNvPr id="49" name="Text 47"/>
           <p:cNvSpPr/>
           <p:nvPr/>
         </p:nvSpPr>
@@ -7873,7 +7901,7 @@
                 <a:ea typeface="Courier New" pitchFamily="34" charset="-122"/>
                 <a:cs typeface="Courier New" pitchFamily="34" charset="-120"/>
               </a:rPr>
-              <a:t>trip1(s1): t=0-&gt;38   bat: 310-&gt;176</a:t>
+              <a:t>|P|=1  |E|=1  threshold=5</a:t>
             </a:r>
             <a:endParaRPr lang="en-US" sz="1000" dirty="0"/>
           </a:p>
@@ -7881,7 +7909,7 @@
       </p:sp>
       <p:sp>
         <p:nvSpPr>
-          <p:cNvPr id="49" name="Text 47"/>
+          <p:cNvPr id="50" name="Text 48"/>
           <p:cNvSpPr/>
           <p:nvPr/>
         </p:nvSpPr>
@@ -7906,13 +7934,13 @@
             <a:r>
               <a:rPr lang="en-US" sz="1000" dirty="0">
                 <a:solidFill>
-                  <a:srgbClr val="58A6FF"/>
+                  <a:srgbClr val="39D353"/>
                 </a:solidFill>
                 <a:latin typeface="Courier New" pitchFamily="34" charset="0"/>
                 <a:ea typeface="Courier New" pitchFamily="34" charset="-122"/>
                 <a:cs typeface="Courier New" pitchFamily="34" charset="-120"/>
               </a:rPr>
-              <a:t>trip2(s2): t=38-&gt;84  bat: 176-&gt;10</a:t>
+              <a:t>plan-length: 8  [OK]</a:t>
             </a:r>
             <a:endParaRPr lang="en-US" sz="1000" dirty="0"/>
           </a:p>
@@ -7920,7 +7948,7 @@
       </p:sp>
       <p:sp>
         <p:nvSpPr>
-          <p:cNvPr id="50" name="Text 48"/>
+          <p:cNvPr id="51" name="Text 49"/>
           <p:cNvSpPr/>
           <p:nvPr/>
         </p:nvSpPr>
@@ -7951,7 +7979,7 @@
                 <a:ea typeface="Courier New" pitchFamily="34" charset="-122"/>
                 <a:cs typeface="Courier New" pitchFamily="34" charset="-120"/>
               </a:rPr>
-              <a:t>elapsed: 84t  bat-remaining: 10</a:t>
+              <a:t>0: (move base site-B) collect s2</a:t>
             </a:r>
             <a:endParaRPr lang="en-US" sz="1000" dirty="0"/>
           </a:p>
@@ -7959,7 +7987,7 @@
       </p:sp>
       <p:sp>
         <p:nvSpPr>
-          <p:cNvPr id="51" name="Text 49"/>
+          <p:cNvPr id="52" name="Text 50"/>
           <p:cNvSpPr/>
           <p:nvPr/>
         </p:nvSpPr>
@@ -7984,13 +8012,52 @@
             <a:r>
               <a:rPr lang="en-US" sz="1000" dirty="0">
                 <a:solidFill>
-                  <a:srgbClr val="39D353"/>
+                  <a:srgbClr val="F0F6FC"/>
                 </a:solidFill>
                 <a:latin typeface="Courier New" pitchFamily="34" charset="0"/>
                 <a:ea typeface="Courier New" pitchFamily="34" charset="-122"/>
                 <a:cs typeface="Courier New" pitchFamily="34" charset="-120"/>
               </a:rPr>
-              <a:t>threshold=5  -&gt;  mission complete [OK]</a:t>
+              <a:t>0: (move site-B base) deliver s2</a:t>
+            </a:r>
+            <a:endParaRPr lang="en-US" sz="1000" dirty="0"/>
+          </a:p>
+        </p:txBody>
+      </p:sp>
+      <p:sp>
+        <p:nvSpPr>
+          <p:cNvPr id="53" name="Text 51"/>
+          <p:cNvSpPr/>
+          <p:nvPr/>
+        </p:nvSpPr>
+        <p:spPr>
+          <a:xfrm>
+            <a:off x="4828032" y="4882896"/>
+            <a:ext cx="3931920" cy="237744"/>
+          </a:xfrm>
+          <a:prstGeom prst="rect">
+            <a:avLst/>
+          </a:prstGeom>
+          <a:noFill/>
+          <a:ln/>
+        </p:spPr>
+        <p:txBody>
+          <a:bodyPr wrap="square" lIns="0" tIns="0" rIns="0" bIns="0" rtlCol="0" anchor="ctr"/>
+          <a:lstStyle/>
+          <a:p>
+            <a:pPr indent="0" marL="0">
+              <a:buNone/>
+            </a:pPr>
+            <a:r>
+              <a:rPr lang="en-US" sz="1000" dirty="0">
+                <a:solidFill>
+                  <a:srgbClr val="F0F6FC"/>
+                </a:solidFill>
+                <a:latin typeface="Courier New" pitchFamily="34" charset="0"/>
+                <a:ea typeface="Courier New" pitchFamily="34" charset="-122"/>
+                <a:cs typeface="Courier New" pitchFamily="34" charset="-120"/>
+              </a:rPr>
+              <a:t>0: (move base site-A) collect+deliver s1</a:t>
             </a:r>
             <a:endParaRPr lang="en-US" sz="1000" dirty="0"/>
           </a:p>
@@ -8263,7 +8330,7 @@
                 <a:ea typeface="Calibri" pitchFamily="34" charset="-122"/>
                 <a:cs typeface="Calibri" pitchFamily="34" charset="-120"/>
               </a:rPr>
-              <a:t>Calibrating battery values for Q2. Continuous drain means the exact numbers matter much more than in Q1 — the planner only finds a plan if the budget is sufficient down to the last time unit.</a:t>
+              <a:t>Calibrating Q2 problems. The continuous drain combined with a large state space caused memory exhaustion. Solved by simplifying the map and reducing battery values while preserving the key insight.</a:t>
             </a:r>
             <a:endParaRPr lang="en-US" sz="1050" dirty="0"/>
           </a:p>
@@ -8426,7 +8493,7 @@
                 <a:ea typeface="Calibri" pitchFamily="34" charset="-122"/>
                 <a:cs typeface="Calibri" pitchFamily="34" charset="-120"/>
               </a:rPr>
-              <a:t>Model a recharge action for Q1 and a solar-charging process for Q2. Also explore durative actions to make move time explicit — ENHSP supports this natively.</a:t>
+              <a:t>Model a recharge action for Q1 and a solar-charging process for Q2. Also use durative actions (via a compatible planner) to make move time explicit and show timing effects more clearly.</a:t>
             </a:r>
             <a:endParaRPr lang="en-US" sz="1050" dirty="0"/>
           </a:p>
@@ -8589,7 +8656,7 @@
                 <a:ea typeface="Calibri" pitchFamily="34" charset="-122"/>
                 <a:cs typeface="Calibri" pitchFamily="34" charset="-120"/>
               </a:rPr>
-              <a:t>The jump from Q1 to Q2 is not just syntax. It's a different model of reality. In Q1 time doesn't exist — in Q2 every second counts. The critical event makes that concrete.</a:t>
+              <a:t>The jump from Q1 to Q2 is not just syntax — it is a different model of reality. In Q1 time does not exist. In Q2 every second counts. The critical event makes that concrete.</a:t>
             </a:r>
             <a:endParaRPr lang="en-US" sz="1050" dirty="0"/>
           </a:p>
@@ -8752,7 +8819,7 @@
                 <a:ea typeface="Calibri" pitchFamily="34" charset="-122"/>
                 <a:cs typeface="Calibri" pitchFamily="34" charset="-120"/>
               </a:rPr>
-              <a:t>No geometry · no uncertainty · no recharge · single sample capacity · linear drain only · task-motion gap (collect-sample hides instrument deployment)</a:t>
+              <a:t>No geometry · no uncertainty · no recharge · single sample capacity · instantaneous moves · linear drain only · task-motion gap (collect-sample hides instrument deployment)</a:t>
             </a:r>
             <a:endParaRPr lang="en-US" sz="1050" dirty="0"/>
           </a:p>
@@ -9794,7 +9861,7 @@
                 <a:ea typeface="Calibri" pitchFamily="34" charset="-122"/>
                 <a:cs typeface="Calibri" pitchFamily="34" charset="-120"/>
               </a:rPr>
-              <a:t>A precondition check on battery-level forces the planner to reason about energy. Changing one number → completely different plan.</a:t>
+              <a:t>Precondition check on battery-level forces the planner to reason about energy. Q1-P1: 4 steps. Q1-P2: 16 steps across 3 trips — planner routes optimally.</a:t>
             </a:r>
             <a:endParaRPr lang="en-US" sz="1150" dirty="0"/>
           </a:p>
@@ -9970,7 +10037,7 @@
                 <a:ea typeface="Calibri" pitchFamily="34" charset="-122"/>
                 <a:cs typeface="Calibri" pitchFamily="34" charset="-120"/>
               </a:rPr>
-              <a:t>Idle drain means waiting costs charge. Critical event is a hard deadline. Timing — not just order — decides the plan.</a:t>
+              <a:t>Idle drain means every second costs charge. Critical event is a hard shutdown. Processes and event coordinate through shared (system-ok) predicate.</a:t>
             </a:r>
             <a:endParaRPr lang="en-US" sz="1150" dirty="0"/>
           </a:p>
@@ -10146,7 +10213,7 @@
                 <a:ea typeface="Calibri" pitchFamily="34" charset="-122"/>
                 <a:cs typeface="Calibri" pitchFamily="34" charset="-120"/>
               </a:rPr>
-              <a:t>Required for numeric-fluents (Q1) and PDDL+ processes &amp; events (Q2). Standard planners cannot handle either.</a:t>
+              <a:t>Required for :numeric-fluents (Q1) and PDDL+ processes &amp; events (Q2). Standard planners cannot handle either. Run with -planner sat-hadd.</a:t>
             </a:r>
             <a:endParaRPr lang="en-US" sz="1150" dirty="0"/>
           </a:p>
